--- a/Reporte 151026.pptx
+++ b/Reporte 151026.pptx
@@ -5,7 +5,7 @@
     <p:sldMasterId id="2147483672" r:id="rId1"/>
   </p:sldMasterIdLst>
   <p:notesMasterIdLst>
-    <p:notesMasterId r:id="rId19"/>
+    <p:notesMasterId r:id="rId18"/>
   </p:notesMasterIdLst>
   <p:sldIdLst>
     <p:sldId id="350" r:id="rId2"/>
@@ -22,24 +22,23 @@
     <p:sldId id="351" r:id="rId13"/>
     <p:sldId id="361" r:id="rId14"/>
     <p:sldId id="412" r:id="rId15"/>
-    <p:sldId id="371" r:id="rId16"/>
-    <p:sldId id="413" r:id="rId17"/>
-    <p:sldId id="280" r:id="rId18"/>
+    <p:sldId id="413" r:id="rId16"/>
+    <p:sldId id="280" r:id="rId17"/>
   </p:sldIdLst>
   <p:sldSz cx="9144000" cy="5143500" type="screen16x9"/>
   <p:notesSz cx="6858000" cy="9144000"/>
   <p:embeddedFontLst>
     <p:embeddedFont>
       <p:font typeface="Montserrat" panose="00000500000000000000" pitchFamily="2" charset="0"/>
-      <p:regular r:id="rId20"/>
-      <p:bold r:id="rId21"/>
-      <p:italic r:id="rId22"/>
-      <p:boldItalic r:id="rId23"/>
+      <p:regular r:id="rId19"/>
+      <p:bold r:id="rId20"/>
+      <p:italic r:id="rId21"/>
+      <p:boldItalic r:id="rId22"/>
     </p:embeddedFont>
     <p:embeddedFont>
       <p:font typeface="Montserrat Black" panose="00000A00000000000000" pitchFamily="2" charset="0"/>
-      <p:bold r:id="rId24"/>
-      <p:boldItalic r:id="rId25"/>
+      <p:bold r:id="rId23"/>
+      <p:boldItalic r:id="rId24"/>
     </p:embeddedFont>
   </p:embeddedFontLst>
   <p:defaultTextStyle>
@@ -6777,10 +6776,10 @@
       </p:sp>
       <p:pic>
         <p:nvPicPr>
-          <p:cNvPr id="7" name="Imagen 6">
+          <p:cNvPr id="4" name="Imagen 3">
             <a:extLst>
               <a:ext uri="{FF2B5EF4-FFF2-40B4-BE49-F238E27FC236}">
-                <a16:creationId xmlns:a16="http://schemas.microsoft.com/office/drawing/2014/main" id="{E255ACA1-9271-F0A7-3CCA-894F4BA05100}"/>
+                <a16:creationId xmlns:a16="http://schemas.microsoft.com/office/drawing/2014/main" id="{AD3B4F5C-870E-2F21-DD12-90CC9172C605}"/>
               </a:ext>
             </a:extLst>
           </p:cNvPr>
@@ -6797,8 +6796,8 @@
         </p:blipFill>
         <p:spPr>
           <a:xfrm>
-            <a:off x="0" y="862614"/>
-            <a:ext cx="9144000" cy="3418271"/>
+            <a:off x="0" y="924903"/>
+            <a:ext cx="9144000" cy="3436570"/>
           </a:xfrm>
           <a:prstGeom prst="rect">
             <a:avLst/>
@@ -6883,10 +6882,10 @@
       </p:sp>
       <p:pic>
         <p:nvPicPr>
-          <p:cNvPr id="4" name="Imagen 3">
+          <p:cNvPr id="3" name="Imagen 2">
             <a:extLst>
               <a:ext uri="{FF2B5EF4-FFF2-40B4-BE49-F238E27FC236}">
-                <a16:creationId xmlns:a16="http://schemas.microsoft.com/office/drawing/2014/main" id="{E02E4074-957C-C3B5-4500-007CF598F548}"/>
+                <a16:creationId xmlns:a16="http://schemas.microsoft.com/office/drawing/2014/main" id="{F88DCF2D-7F48-DE67-35AD-430C1F06F523}"/>
               </a:ext>
             </a:extLst>
           </p:cNvPr>
@@ -6903,8 +6902,8 @@
         </p:blipFill>
         <p:spPr>
           <a:xfrm>
-            <a:off x="0" y="1286271"/>
-            <a:ext cx="9144000" cy="2713834"/>
+            <a:off x="0" y="1297448"/>
+            <a:ext cx="9144000" cy="2691479"/>
           </a:xfrm>
           <a:prstGeom prst="rect">
             <a:avLst/>
@@ -6989,10 +6988,10 @@
       </p:sp>
       <p:pic>
         <p:nvPicPr>
-          <p:cNvPr id="5" name="Imagen 4">
+          <p:cNvPr id="4" name="Imagen 3">
             <a:extLst>
               <a:ext uri="{FF2B5EF4-FFF2-40B4-BE49-F238E27FC236}">
-                <a16:creationId xmlns:a16="http://schemas.microsoft.com/office/drawing/2014/main" id="{8DCE8016-2717-7624-D54D-4DD01F5864D9}"/>
+                <a16:creationId xmlns:a16="http://schemas.microsoft.com/office/drawing/2014/main" id="{370446AA-9915-08BC-AE6A-B79288522263}"/>
               </a:ext>
             </a:extLst>
           </p:cNvPr>
@@ -7009,8 +7008,8 @@
         </p:blipFill>
         <p:spPr>
           <a:xfrm>
-            <a:off x="0" y="861595"/>
-            <a:ext cx="9144000" cy="3563185"/>
+            <a:off x="0" y="842278"/>
+            <a:ext cx="9144000" cy="3458944"/>
           </a:xfrm>
           <a:prstGeom prst="rect">
             <a:avLst/>
@@ -7093,126 +7092,12 @@
           </a:p>
         </p:txBody>
       </p:sp>
-      <p:sp>
-        <p:nvSpPr>
-          <p:cNvPr id="4" name="CuadroTexto 3">
+      <p:pic>
+        <p:nvPicPr>
+          <p:cNvPr id="3" name="Imagen 2">
             <a:extLst>
               <a:ext uri="{FF2B5EF4-FFF2-40B4-BE49-F238E27FC236}">
-                <a16:creationId xmlns:a16="http://schemas.microsoft.com/office/drawing/2014/main" id="{A447C9E1-9991-B26D-6B27-ED0D5D0063DD}"/>
-              </a:ext>
-            </a:extLst>
-          </p:cNvPr>
-          <p:cNvSpPr txBox="1"/>
-          <p:nvPr/>
-        </p:nvSpPr>
-        <p:spPr>
-          <a:xfrm>
-            <a:off x="2037600" y="2320022"/>
-            <a:ext cx="5184000" cy="646331"/>
-          </a:xfrm>
-          <a:prstGeom prst="rect">
-            <a:avLst/>
-          </a:prstGeom>
-          <a:noFill/>
-        </p:spPr>
-        <p:txBody>
-          <a:bodyPr wrap="square" rtlCol="0">
-            <a:spAutoFit/>
-          </a:bodyPr>
-          <a:lstStyle/>
-          <a:p>
-            <a:pPr algn="ctr"/>
-            <a:r>
-              <a:rPr lang="es-MX" sz="1800" b="1" dirty="0">
-                <a:latin typeface="Montserrat" panose="00000500000000000000" pitchFamily="2" charset="0"/>
-              </a:rPr>
-              <a:t>No se registró información del gobernador en radiodifusoras</a:t>
-            </a:r>
-          </a:p>
-        </p:txBody>
-      </p:sp>
-    </p:spTree>
-    <p:extLst>
-      <p:ext uri="{BB962C8B-B14F-4D97-AF65-F5344CB8AC3E}">
-        <p14:creationId xmlns:p14="http://schemas.microsoft.com/office/powerpoint/2010/main" val="2170024936"/>
-      </p:ext>
-    </p:extLst>
-  </p:cSld>
-  <p:clrMapOvr>
-    <a:masterClrMapping/>
-  </p:clrMapOvr>
-</p:sld>
-</file>
-
-<file path=ppt/slides/slide15.xml><?xml version="1.0" encoding="utf-8"?>
-<p:sld xmlns:a="http://schemas.openxmlformats.org/drawingml/2006/main" xmlns:r="http://schemas.openxmlformats.org/officeDocument/2006/relationships" xmlns:p="http://schemas.openxmlformats.org/presentationml/2006/main">
-  <p:cSld>
-    <p:bg>
-      <p:bgPr>
-        <a:solidFill>
-          <a:srgbClr val="F8F9FA"/>
-        </a:solidFill>
-        <a:effectLst/>
-      </p:bgPr>
-    </p:bg>
-    <p:spTree>
-      <p:nvGrpSpPr>
-        <p:cNvPr id="1" name=""/>
-        <p:cNvGrpSpPr/>
-        <p:nvPr/>
-      </p:nvGrpSpPr>
-      <p:grpSpPr>
-        <a:xfrm>
-          <a:off x="0" y="0"/>
-          <a:ext cx="0" cy="0"/>
-          <a:chOff x="0" y="0"/>
-          <a:chExt cx="0" cy="0"/>
-        </a:xfrm>
-      </p:grpSpPr>
-      <p:sp>
-        <p:nvSpPr>
-          <p:cNvPr id="6" name="CuadroTexto 5">
-            <a:extLst>
-              <a:ext uri="{FF2B5EF4-FFF2-40B4-BE49-F238E27FC236}">
-                <a16:creationId xmlns:a16="http://schemas.microsoft.com/office/drawing/2014/main" id="{CE4F37E4-6BA2-F83F-177F-21C522FF978A}"/>
-              </a:ext>
-            </a:extLst>
-          </p:cNvPr>
-          <p:cNvSpPr txBox="1"/>
-          <p:nvPr/>
-        </p:nvSpPr>
-        <p:spPr>
-          <a:xfrm>
-            <a:off x="1926166" y="88135"/>
-            <a:ext cx="5291667" cy="307777"/>
-          </a:xfrm>
-          <a:prstGeom prst="rect">
-            <a:avLst/>
-          </a:prstGeom>
-          <a:noFill/>
-        </p:spPr>
-        <p:txBody>
-          <a:bodyPr wrap="square" rtlCol="0">
-            <a:spAutoFit/>
-          </a:bodyPr>
-          <a:lstStyle/>
-          <a:p>
-            <a:pPr algn="ctr"/>
-            <a:r>
-              <a:rPr lang="es-MX" b="1" dirty="0">
-                <a:latin typeface="Montserrat" pitchFamily="2" charset="0"/>
-              </a:rPr>
-              <a:t>Temas de gobierno por radiodifusora</a:t>
-            </a:r>
-          </a:p>
-        </p:txBody>
-      </p:sp>
-      <p:pic>
-        <p:nvPicPr>
-          <p:cNvPr id="4" name="Imagen 3">
-            <a:extLst>
-              <a:ext uri="{FF2B5EF4-FFF2-40B4-BE49-F238E27FC236}">
-                <a16:creationId xmlns:a16="http://schemas.microsoft.com/office/drawing/2014/main" id="{D51EFAE0-83FC-1202-2502-D7A9E38C8C5F}"/>
+                <a16:creationId xmlns:a16="http://schemas.microsoft.com/office/drawing/2014/main" id="{3B5BA629-A102-5996-1AFD-90269D6A658F}"/>
               </a:ext>
             </a:extLst>
           </p:cNvPr>
@@ -7229,8 +7114,8 @@
         </p:blipFill>
         <p:spPr>
           <a:xfrm>
-            <a:off x="0" y="642938"/>
-            <a:ext cx="9144000" cy="4000500"/>
+            <a:off x="-6725" y="692269"/>
+            <a:ext cx="9144000" cy="3901837"/>
           </a:xfrm>
           <a:prstGeom prst="rect">
             <a:avLst/>
@@ -7240,7 +7125,7 @@
     </p:spTree>
     <p:extLst>
       <p:ext uri="{BB962C8B-B14F-4D97-AF65-F5344CB8AC3E}">
-        <p14:creationId xmlns:p14="http://schemas.microsoft.com/office/powerpoint/2010/main" val="3202946265"/>
+        <p14:creationId xmlns:p14="http://schemas.microsoft.com/office/powerpoint/2010/main" val="2170024936"/>
       </p:ext>
     </p:extLst>
   </p:cSld>
@@ -7250,7 +7135,7 @@
 </p:sld>
 </file>
 
-<file path=ppt/slides/slide16.xml><?xml version="1.0" encoding="utf-8"?>
+<file path=ppt/slides/slide15.xml><?xml version="1.0" encoding="utf-8"?>
 <p:sld xmlns:a="http://schemas.openxmlformats.org/drawingml/2006/main" xmlns:r="http://schemas.openxmlformats.org/officeDocument/2006/relationships" xmlns:p="http://schemas.openxmlformats.org/presentationml/2006/main">
   <p:cSld>
     <p:bg>
@@ -7321,10 +7206,10 @@
       </p:sp>
       <p:pic>
         <p:nvPicPr>
-          <p:cNvPr id="4" name="Imagen 3">
+          <p:cNvPr id="3" name="Imagen 2">
             <a:extLst>
               <a:ext uri="{FF2B5EF4-FFF2-40B4-BE49-F238E27FC236}">
-                <a16:creationId xmlns:a16="http://schemas.microsoft.com/office/drawing/2014/main" id="{67679B8D-9E3E-3401-87C3-9019DF80EA54}"/>
+                <a16:creationId xmlns:a16="http://schemas.microsoft.com/office/drawing/2014/main" id="{2EE4BC94-E4F5-6516-4FFA-8D9F2DCA358A}"/>
               </a:ext>
             </a:extLst>
           </p:cNvPr>
@@ -7341,8 +7226,8 @@
         </p:blipFill>
         <p:spPr>
           <a:xfrm>
-            <a:off x="1926166" y="923925"/>
-            <a:ext cx="5200650" cy="3438525"/>
+            <a:off x="42688" y="331080"/>
+            <a:ext cx="8985600" cy="4624216"/>
           </a:xfrm>
           <a:prstGeom prst="rect">
             <a:avLst/>
@@ -7362,7 +7247,7 @@
 </p:sld>
 </file>
 
-<file path=ppt/slides/slide17.xml><?xml version="1.0" encoding="utf-8"?>
+<file path=ppt/slides/slide16.xml><?xml version="1.0" encoding="utf-8"?>
 <p:sld xmlns:a="http://schemas.openxmlformats.org/drawingml/2006/main" xmlns:r="http://schemas.openxmlformats.org/officeDocument/2006/relationships" xmlns:p="http://schemas.openxmlformats.org/presentationml/2006/main">
   <p:cSld>
     <p:spTree>
